--- a/model_Building_files/EDA_ppt.pptx
+++ b/model_Building_files/EDA_ppt.pptx
@@ -4235,7 +4235,7 @@
           <a:p>
             <a:fld id="{ADE47F5B-B127-4226-8F10-3D4A1353A31B}" type="datetimeFigureOut">
               <a:rPr lang="en-IN" smtClean="0"/>
-              <a:t>23-09-2024</a:t>
+              <a:t>04-10-2024</a:t>
             </a:fld>
             <a:endParaRPr lang="en-IN"/>
           </a:p>
@@ -4820,7 +4820,7 @@
           <a:p>
             <a:fld id="{D1CCBB49-90EF-43AA-A24F-05AA478E87E6}" type="datetimeFigureOut">
               <a:rPr lang="en-IN" smtClean="0"/>
-              <a:t>23-09-2024</a:t>
+              <a:t>04-10-2024</a:t>
             </a:fld>
             <a:endParaRPr lang="en-IN"/>
           </a:p>
@@ -5020,7 +5020,7 @@
           <a:p>
             <a:fld id="{D1CCBB49-90EF-43AA-A24F-05AA478E87E6}" type="datetimeFigureOut">
               <a:rPr lang="en-IN" smtClean="0"/>
-              <a:t>23-09-2024</a:t>
+              <a:t>04-10-2024</a:t>
             </a:fld>
             <a:endParaRPr lang="en-IN"/>
           </a:p>
@@ -5230,7 +5230,7 @@
           <a:p>
             <a:fld id="{D1CCBB49-90EF-43AA-A24F-05AA478E87E6}" type="datetimeFigureOut">
               <a:rPr lang="en-IN" smtClean="0"/>
-              <a:t>23-09-2024</a:t>
+              <a:t>04-10-2024</a:t>
             </a:fld>
             <a:endParaRPr lang="en-IN"/>
           </a:p>
@@ -5430,7 +5430,7 @@
           <a:p>
             <a:fld id="{D1CCBB49-90EF-43AA-A24F-05AA478E87E6}" type="datetimeFigureOut">
               <a:rPr lang="en-IN" smtClean="0"/>
-              <a:t>23-09-2024</a:t>
+              <a:t>04-10-2024</a:t>
             </a:fld>
             <a:endParaRPr lang="en-IN"/>
           </a:p>
@@ -5706,7 +5706,7 @@
           <a:p>
             <a:fld id="{D1CCBB49-90EF-43AA-A24F-05AA478E87E6}" type="datetimeFigureOut">
               <a:rPr lang="en-IN" smtClean="0"/>
-              <a:t>23-09-2024</a:t>
+              <a:t>04-10-2024</a:t>
             </a:fld>
             <a:endParaRPr lang="en-IN"/>
           </a:p>
@@ -5974,7 +5974,7 @@
           <a:p>
             <a:fld id="{D1CCBB49-90EF-43AA-A24F-05AA478E87E6}" type="datetimeFigureOut">
               <a:rPr lang="en-IN" smtClean="0"/>
-              <a:t>23-09-2024</a:t>
+              <a:t>04-10-2024</a:t>
             </a:fld>
             <a:endParaRPr lang="en-IN"/>
           </a:p>
@@ -6389,7 +6389,7 @@
           <a:p>
             <a:fld id="{D1CCBB49-90EF-43AA-A24F-05AA478E87E6}" type="datetimeFigureOut">
               <a:rPr lang="en-IN" smtClean="0"/>
-              <a:t>23-09-2024</a:t>
+              <a:t>04-10-2024</a:t>
             </a:fld>
             <a:endParaRPr lang="en-IN"/>
           </a:p>
@@ -6531,7 +6531,7 @@
           <a:p>
             <a:fld id="{D1CCBB49-90EF-43AA-A24F-05AA478E87E6}" type="datetimeFigureOut">
               <a:rPr lang="en-IN" smtClean="0"/>
-              <a:t>23-09-2024</a:t>
+              <a:t>04-10-2024</a:t>
             </a:fld>
             <a:endParaRPr lang="en-IN"/>
           </a:p>
@@ -6644,7 +6644,7 @@
           <a:p>
             <a:fld id="{D1CCBB49-90EF-43AA-A24F-05AA478E87E6}" type="datetimeFigureOut">
               <a:rPr lang="en-IN" smtClean="0"/>
-              <a:t>23-09-2024</a:t>
+              <a:t>04-10-2024</a:t>
             </a:fld>
             <a:endParaRPr lang="en-IN"/>
           </a:p>
@@ -6957,7 +6957,7 @@
           <a:p>
             <a:fld id="{D1CCBB49-90EF-43AA-A24F-05AA478E87E6}" type="datetimeFigureOut">
               <a:rPr lang="en-IN" smtClean="0"/>
-              <a:t>23-09-2024</a:t>
+              <a:t>04-10-2024</a:t>
             </a:fld>
             <a:endParaRPr lang="en-IN"/>
           </a:p>
@@ -7246,7 +7246,7 @@
           <a:p>
             <a:fld id="{D1CCBB49-90EF-43AA-A24F-05AA478E87E6}" type="datetimeFigureOut">
               <a:rPr lang="en-IN" smtClean="0"/>
-              <a:t>23-09-2024</a:t>
+              <a:t>04-10-2024</a:t>
             </a:fld>
             <a:endParaRPr lang="en-IN"/>
           </a:p>
@@ -7489,7 +7489,7 @@
           <a:p>
             <a:fld id="{D1CCBB49-90EF-43AA-A24F-05AA478E87E6}" type="datetimeFigureOut">
               <a:rPr lang="en-IN" smtClean="0"/>
-              <a:t>23-09-2024</a:t>
+              <a:t>04-10-2024</a:t>
             </a:fld>
             <a:endParaRPr lang="en-IN"/>
           </a:p>
@@ -8204,7 +8204,7 @@
         </p:nvSpPr>
         <p:spPr>
           <a:xfrm>
-            <a:off x="7186367" y="1798872"/>
+            <a:off x="6096000" y="1663086"/>
             <a:ext cx="5005633" cy="523220"/>
           </a:xfrm>
           <a:prstGeom prst="rect">
@@ -8219,7 +8219,7 @@
           <a:lstStyle/>
           <a:p>
             <a:r>
-              <a:rPr lang="en-US" sz="2800" b="1" dirty="0">
+              <a:rPr lang="en-IN" sz="2800" b="1" dirty="0">
                 <a:solidFill>
                   <a:schemeClr val="tx1">
                     <a:lumMod val="65000"/>
@@ -8227,16 +8227,8 @@
                   </a:schemeClr>
                 </a:solidFill>
               </a:rPr>
-              <a:t>Exploratory Data Analysis</a:t>
-            </a:r>
-            <a:endParaRPr lang="en-IN" sz="2800" b="1" dirty="0">
-              <a:solidFill>
-                <a:schemeClr val="tx1">
-                  <a:lumMod val="65000"/>
-                  <a:lumOff val="35000"/>
-                </a:schemeClr>
-              </a:solidFill>
-            </a:endParaRPr>
+              <a:t>Model Validation &amp; Deployment</a:t>
+            </a:r>
           </a:p>
         </p:txBody>
       </p:sp>
